--- a/test-corpus/word-verification/cynefin.pptx
+++ b/test-corpus/word-verification/cynefin.pptx
@@ -144,7 +144,7 @@
         </p:nvSpPr>
         <p:spPr>
           <a:xfrm>
-            <a:off x="3379770" y="1028700"/>
+            <a:off x="1258362" y="1028700"/>
             <a:ext cx="5432461" cy="342044"/>
           </a:xfrm>
           <a:prstGeom prst="rect">
@@ -186,7 +186,7 @@
         </p:nvCxnSpPr>
         <p:spPr>
           <a:xfrm>
-            <a:off x="6096000" y="2577957"/>
+            <a:off x="3974592" y="2577957"/>
             <a:ext cx="1" cy="1"/>
           </a:xfrm>
           <a:prstGeom prst="line">
@@ -209,7 +209,7 @@
         </p:nvSpPr>
         <p:spPr>
           <a:xfrm>
-            <a:off x="5609091" y="2487416"/>
+            <a:off x="3487683" y="2487416"/>
             <a:ext cx="973819" cy="181082"/>
           </a:xfrm>
           <a:prstGeom prst="rect">
@@ -251,7 +251,7 @@
         </p:nvCxnSpPr>
         <p:spPr>
           <a:xfrm>
-            <a:off x="7303213" y="3785171"/>
+            <a:off x="5181805" y="3785171"/>
             <a:ext cx="1" cy="1"/>
           </a:xfrm>
           <a:prstGeom prst="line">
@@ -274,7 +274,7 @@
         </p:nvSpPr>
         <p:spPr>
           <a:xfrm>
-            <a:off x="6731799" y="3694630"/>
+            <a:off x="4610391" y="3694630"/>
             <a:ext cx="1142829" cy="181082"/>
           </a:xfrm>
           <a:prstGeom prst="rect">
@@ -316,7 +316,7 @@
         </p:nvCxnSpPr>
         <p:spPr>
           <a:xfrm>
-            <a:off x="6096000" y="4992384"/>
+            <a:off x="3974592" y="4992384"/>
             <a:ext cx="1" cy="1"/>
           </a:xfrm>
           <a:prstGeom prst="line">
@@ -339,7 +339,7 @@
         </p:nvSpPr>
         <p:spPr>
           <a:xfrm>
-            <a:off x="5766028" y="4901843"/>
+            <a:off x="3644620" y="4901843"/>
             <a:ext cx="659943" cy="181082"/>
           </a:xfrm>
           <a:prstGeom prst="rect">
@@ -381,7 +381,7 @@
         </p:nvCxnSpPr>
         <p:spPr>
           <a:xfrm>
-            <a:off x="4888787" y="3785171"/>
+            <a:off x="2767379" y="3785171"/>
             <a:ext cx="1" cy="1"/>
           </a:xfrm>
           <a:prstGeom prst="line">
@@ -404,7 +404,7 @@
         </p:nvSpPr>
         <p:spPr>
           <a:xfrm>
-            <a:off x="4582959" y="3694630"/>
+            <a:off x="2461551" y="3694630"/>
             <a:ext cx="611655" cy="181082"/>
           </a:xfrm>
           <a:prstGeom prst="rect">
@@ -446,7 +446,7 @@
         </p:nvSpPr>
         <p:spPr>
           <a:xfrm>
-            <a:off x="3681573" y="1370744"/>
+            <a:off x="1560165" y="1370744"/>
             <a:ext cx="2414427" cy="2414427"/>
           </a:xfrm>
           <a:prstGeom prst="rect">
@@ -470,7 +470,7 @@
         </p:nvSpPr>
         <p:spPr>
           <a:xfrm>
-            <a:off x="3741934" y="1410984"/>
+            <a:off x="1620526" y="1410984"/>
             <a:ext cx="2293706" cy="201202"/>
           </a:xfrm>
           <a:prstGeom prst="rect">
@@ -512,7 +512,7 @@
         </p:nvSpPr>
         <p:spPr>
           <a:xfrm>
-            <a:off x="3741934" y="1612187"/>
+            <a:off x="1620526" y="1612187"/>
             <a:ext cx="2293706" cy="160962"/>
           </a:xfrm>
           <a:prstGeom prst="rect">
@@ -554,7 +554,7 @@
         </p:nvSpPr>
         <p:spPr>
           <a:xfrm>
-            <a:off x="3741934" y="1833509"/>
+            <a:off x="1620526" y="1833509"/>
             <a:ext cx="828953" cy="160962"/>
           </a:xfrm>
           <a:prstGeom prst="roundRect">
@@ -578,7 +578,7 @@
         </p:nvSpPr>
         <p:spPr>
           <a:xfrm>
-            <a:off x="3741934" y="1833509"/>
+            <a:off x="1620526" y="1833509"/>
             <a:ext cx="828953" cy="160962"/>
           </a:xfrm>
           <a:prstGeom prst="rect">
@@ -620,7 +620,7 @@
         </p:nvSpPr>
         <p:spPr>
           <a:xfrm>
-            <a:off x="6096000" y="1370744"/>
+            <a:off x="3974592" y="1370744"/>
             <a:ext cx="2414427" cy="2414427"/>
           </a:xfrm>
           <a:prstGeom prst="rect">
@@ -644,7 +644,7 @@
         </p:nvSpPr>
         <p:spPr>
           <a:xfrm>
-            <a:off x="6156361" y="1410984"/>
+            <a:off x="4034953" y="1410984"/>
             <a:ext cx="2293706" cy="201202"/>
           </a:xfrm>
           <a:prstGeom prst="rect">
@@ -686,7 +686,7 @@
         </p:nvSpPr>
         <p:spPr>
           <a:xfrm>
-            <a:off x="6156361" y="1612187"/>
+            <a:off x="4034953" y="1612187"/>
             <a:ext cx="2293706" cy="160962"/>
           </a:xfrm>
           <a:prstGeom prst="rect">
@@ -728,7 +728,7 @@
         </p:nvSpPr>
         <p:spPr>
           <a:xfrm>
-            <a:off x="6156361" y="1833509"/>
+            <a:off x="4034953" y="1833509"/>
             <a:ext cx="1070396" cy="160962"/>
           </a:xfrm>
           <a:prstGeom prst="roundRect">
@@ -752,7 +752,7 @@
         </p:nvSpPr>
         <p:spPr>
           <a:xfrm>
-            <a:off x="6156361" y="1833509"/>
+            <a:off x="4034953" y="1833509"/>
             <a:ext cx="1070396" cy="160962"/>
           </a:xfrm>
           <a:prstGeom prst="rect">
@@ -794,7 +794,7 @@
         </p:nvSpPr>
         <p:spPr>
           <a:xfrm>
-            <a:off x="3681573" y="3785171"/>
+            <a:off x="1560165" y="3785171"/>
             <a:ext cx="2414427" cy="2414427"/>
           </a:xfrm>
           <a:prstGeom prst="rect">
@@ -818,7 +818,7 @@
         </p:nvSpPr>
         <p:spPr>
           <a:xfrm>
-            <a:off x="3741934" y="3825411"/>
+            <a:off x="1620526" y="3825411"/>
             <a:ext cx="2293706" cy="201202"/>
           </a:xfrm>
           <a:prstGeom prst="rect">
@@ -860,7 +860,7 @@
         </p:nvSpPr>
         <p:spPr>
           <a:xfrm>
-            <a:off x="3741934" y="4026613"/>
+            <a:off x="1620526" y="4026613"/>
             <a:ext cx="2293706" cy="160962"/>
           </a:xfrm>
           <a:prstGeom prst="rect">
@@ -902,7 +902,7 @@
         </p:nvSpPr>
         <p:spPr>
           <a:xfrm>
-            <a:off x="3741934" y="4247936"/>
+            <a:off x="1620526" y="4247936"/>
             <a:ext cx="925530" cy="160962"/>
           </a:xfrm>
           <a:prstGeom prst="roundRect">
@@ -926,7 +926,7 @@
         </p:nvSpPr>
         <p:spPr>
           <a:xfrm>
-            <a:off x="3741934" y="4247936"/>
+            <a:off x="1620526" y="4247936"/>
             <a:ext cx="925530" cy="160962"/>
           </a:xfrm>
           <a:prstGeom prst="rect">
@@ -968,7 +968,7 @@
         </p:nvSpPr>
         <p:spPr>
           <a:xfrm>
-            <a:off x="6096000" y="3785171"/>
+            <a:off x="3974592" y="3785171"/>
             <a:ext cx="2414427" cy="2414427"/>
           </a:xfrm>
           <a:prstGeom prst="rect">
@@ -992,7 +992,7 @@
         </p:nvSpPr>
         <p:spPr>
           <a:xfrm>
-            <a:off x="6156361" y="3825411"/>
+            <a:off x="4034953" y="3825411"/>
             <a:ext cx="2293706" cy="201202"/>
           </a:xfrm>
           <a:prstGeom prst="rect">
@@ -1034,7 +1034,7 @@
         </p:nvSpPr>
         <p:spPr>
           <a:xfrm>
-            <a:off x="6156361" y="4026613"/>
+            <a:off x="4034953" y="4026613"/>
             <a:ext cx="2293706" cy="160962"/>
           </a:xfrm>
           <a:prstGeom prst="rect">
@@ -1076,7 +1076,7 @@
         </p:nvSpPr>
         <p:spPr>
           <a:xfrm>
-            <a:off x="6156361" y="4247936"/>
+            <a:off x="4034953" y="4247936"/>
             <a:ext cx="877242" cy="160962"/>
           </a:xfrm>
           <a:prstGeom prst="roundRect">
@@ -1100,7 +1100,7 @@
         </p:nvSpPr>
         <p:spPr>
           <a:xfrm>
-            <a:off x="6156361" y="4247936"/>
+            <a:off x="4034953" y="4247936"/>
             <a:ext cx="877242" cy="160962"/>
           </a:xfrm>
           <a:prstGeom prst="rect">
@@ -1142,7 +1142,7 @@
         </p:nvSpPr>
         <p:spPr>
           <a:xfrm>
-            <a:off x="5411912" y="3101083"/>
+            <a:off x="3290504" y="3101083"/>
             <a:ext cx="1368175" cy="1368175"/>
           </a:xfrm>
           <a:prstGeom prst="ellipse">
@@ -1166,7 +1166,7 @@
         </p:nvSpPr>
         <p:spPr>
           <a:xfrm>
-            <a:off x="5452153" y="3141324"/>
+            <a:off x="3330745" y="3141324"/>
             <a:ext cx="1287694" cy="160962"/>
           </a:xfrm>
           <a:prstGeom prst="rect">
@@ -1196,6 +1196,233 @@
                 </a:solidFill>
               </a:rPr>
               <a:t>Confusion</a:t>
+            </a:r>
+          </a:p>
+        </p:txBody>
+      </p:sp>
+      <p:sp>
+        <p:nvSpPr>
+          <p:cNvPr id="4" name="Mermaid source"/>
+          <p:cNvSpPr/>
+          <p:nvPr/>
+        </p:nvSpPr>
+        <p:spPr>
+          <a:xfrm>
+            <a:off x="7674864" y="1028700"/>
+            <a:ext cx="4059936" cy="5372100"/>
+          </a:xfrm>
+          <a:prstGeom prst="rect">
+            <a:avLst/>
+          </a:prstGeom>
+          <a:solidFill>
+            <a:srgbClr val="F3F4F6"/>
+          </a:solidFill>
+          <a:ln w="9525">
+            <a:solidFill>
+              <a:srgbClr val="D1D5DB"/>
+            </a:solidFill>
+          </a:ln>
+        </p:spPr>
+        <p:txBody>
+          <a:bodyPr wrap="square" lIns="91440" tIns="45720" rIns="91440" bIns="45720" anchor="t">
+            <a:noAutofit/>
+          </a:bodyPr>
+          <a:lstStyle/>
+          <a:p>
+            <a:pPr algn="l"/>
+            <a:r>
+              <a:rPr lang="en-US" sz="1400" dirty="0">
+                <a:solidFill>
+                  <a:srgbClr val="1F2937"/>
+                </a:solidFill>
+                <a:latin typeface="Consolas"/>
+                <a:cs typeface="Consolas"/>
+              </a:rPr>
+              <a:t>cynefin-beta</a:t>
+            </a:r>
+          </a:p>
+          <a:p>
+            <a:pPr algn="l"/>
+            <a:r>
+              <a:rPr lang="en-US" sz="1400" dirty="0">
+                <a:solidFill>
+                  <a:srgbClr val="1F2937"/>
+                </a:solidFill>
+                <a:latin typeface="Consolas"/>
+                <a:cs typeface="Consolas"/>
+              </a:rPr>
+              <a:t>  title Strategy Categorization</a:t>
+            </a:r>
+          </a:p>
+          <a:p>
+            <a:endParaRPr lang="en-US" sz="1400" dirty="0"/>
+          </a:p>
+          <a:p>
+            <a:pPr algn="l"/>
+            <a:r>
+              <a:rPr lang="en-US" sz="1400" dirty="0">
+                <a:solidFill>
+                  <a:srgbClr val="1F2937"/>
+                </a:solidFill>
+                <a:latin typeface="Consolas"/>
+                <a:cs typeface="Consolas"/>
+              </a:rPr>
+              <a:t>  complex</a:t>
+            </a:r>
+          </a:p>
+          <a:p>
+            <a:pPr algn="l"/>
+            <a:r>
+              <a:rPr lang="en-US" sz="1400" dirty="0">
+                <a:solidFill>
+                  <a:srgbClr val="1F2937"/>
+                </a:solidFill>
+                <a:latin typeface="Consolas"/>
+                <a:cs typeface="Consolas"/>
+              </a:rPr>
+              <a:t>    "Market research"</a:t>
+            </a:r>
+          </a:p>
+          <a:p>
+            <a:endParaRPr lang="en-US" sz="1400" dirty="0"/>
+          </a:p>
+          <a:p>
+            <a:pPr algn="l"/>
+            <a:r>
+              <a:rPr lang="en-US" sz="1400" dirty="0">
+                <a:solidFill>
+                  <a:srgbClr val="1F2937"/>
+                </a:solidFill>
+                <a:latin typeface="Consolas"/>
+                <a:cs typeface="Consolas"/>
+              </a:rPr>
+              <a:t>  complicated</a:t>
+            </a:r>
+          </a:p>
+          <a:p>
+            <a:pPr algn="l"/>
+            <a:r>
+              <a:rPr lang="en-US" sz="1400" dirty="0">
+                <a:solidFill>
+                  <a:srgbClr val="1F2937"/>
+                </a:solidFill>
+                <a:latin typeface="Consolas"/>
+                <a:cs typeface="Consolas"/>
+              </a:rPr>
+              <a:t>    "Competitive analysis"</a:t>
+            </a:r>
+          </a:p>
+          <a:p>
+            <a:endParaRPr lang="en-US" sz="1400" dirty="0"/>
+          </a:p>
+          <a:p>
+            <a:pPr algn="l"/>
+            <a:r>
+              <a:rPr lang="en-US" sz="1400" dirty="0">
+                <a:solidFill>
+                  <a:srgbClr val="1F2937"/>
+                </a:solidFill>
+                <a:latin typeface="Consolas"/>
+                <a:cs typeface="Consolas"/>
+              </a:rPr>
+              <a:t>  clear</a:t>
+            </a:r>
+          </a:p>
+          <a:p>
+            <a:pPr algn="l"/>
+            <a:r>
+              <a:rPr lang="en-US" sz="1400" dirty="0">
+                <a:solidFill>
+                  <a:srgbClr val="1F2937"/>
+                </a:solidFill>
+                <a:latin typeface="Consolas"/>
+                <a:cs typeface="Consolas"/>
+              </a:rPr>
+              <a:t>    "Standard pricing"</a:t>
+            </a:r>
+          </a:p>
+          <a:p>
+            <a:endParaRPr lang="en-US" sz="1400" dirty="0"/>
+          </a:p>
+          <a:p>
+            <a:pPr algn="l"/>
+            <a:r>
+              <a:rPr lang="en-US" sz="1400" dirty="0">
+                <a:solidFill>
+                  <a:srgbClr val="1F2937"/>
+                </a:solidFill>
+                <a:latin typeface="Consolas"/>
+                <a:cs typeface="Consolas"/>
+              </a:rPr>
+              <a:t>  chaotic</a:t>
+            </a:r>
+          </a:p>
+          <a:p>
+            <a:pPr algn="l"/>
+            <a:r>
+              <a:rPr lang="en-US" sz="1400" dirty="0">
+                <a:solidFill>
+                  <a:srgbClr val="1F2937"/>
+                </a:solidFill>
+                <a:latin typeface="Consolas"/>
+                <a:cs typeface="Consolas"/>
+              </a:rPr>
+              <a:t>    "Crisis management"</a:t>
+            </a:r>
+          </a:p>
+          <a:p>
+            <a:endParaRPr lang="en-US" sz="1400" dirty="0"/>
+          </a:p>
+          <a:p>
+            <a:pPr algn="l"/>
+            <a:r>
+              <a:rPr lang="en-US" sz="1400" dirty="0">
+                <a:solidFill>
+                  <a:srgbClr val="1F2937"/>
+                </a:solidFill>
+                <a:latin typeface="Consolas"/>
+                <a:cs typeface="Consolas"/>
+              </a:rPr>
+              <a:t>  complex --&gt; complicated : "Pattern identified"</a:t>
+            </a:r>
+          </a:p>
+          <a:p>
+            <a:pPr algn="l"/>
+            <a:r>
+              <a:rPr lang="en-US" sz="1400" dirty="0">
+                <a:solidFill>
+                  <a:srgbClr val="1F2937"/>
+                </a:solidFill>
+                <a:latin typeface="Consolas"/>
+                <a:cs typeface="Consolas"/>
+              </a:rPr>
+              <a:t>  complicated --&gt; clear : "Best practice codified"</a:t>
+            </a:r>
+          </a:p>
+          <a:p>
+            <a:pPr algn="l"/>
+            <a:r>
+              <a:rPr lang="en-US" sz="1400" dirty="0">
+                <a:solidFill>
+                  <a:srgbClr val="1F2937"/>
+                </a:solidFill>
+                <a:latin typeface="Consolas"/>
+                <a:cs typeface="Consolas"/>
+              </a:rPr>
+              <a:t>  clear --&gt; chaotic : "Complacency"</a:t>
+            </a:r>
+          </a:p>
+          <a:p>
+            <a:pPr algn="l"/>
+            <a:r>
+              <a:rPr lang="en-US" sz="1400" dirty="0">
+                <a:solidFill>
+                  <a:srgbClr val="1F2937"/>
+                </a:solidFill>
+                <a:latin typeface="Consolas"/>
+                <a:cs typeface="Consolas"/>
+              </a:rPr>
+              <a:t>  chaotic --&gt; complex : "Stabilized"</a:t>
             </a:r>
           </a:p>
         </p:txBody>
